--- a/_agent/06_会議/開発課題検討会/20261013/01_input/開発課題検討会_20261013_厚労省側.pptx
+++ b/_agent/06_会議/開発課題検討会/20261013/01_input/開発課題検討会_20261013_厚労省側.pptx
@@ -43915,10 +43915,9 @@
 </file>
 
 <file path=customXml/item2.xml><?xml version="1.0" encoding="utf-8"?>
-<ct:contentTypeSchema xmlns:ct="http://schemas.microsoft.com/office/2006/metadata/contentType" xmlns:ma="http://schemas.microsoft.com/office/2006/metadata/properties/metaAttributes" ct:_="" ma:_="" ma:contentTypeName="Document" ma:contentTypeID="0x010100A05F1B5A1E0F1943BC6DE70F45133712" ma:contentTypeVersion="12" ma:contentTypeDescription="Create a new document." ma:contentTypeScope="" ma:versionID="20a18e3ff9fb0cc056a84525e9061d4f">
-  <xsd:schema xmlns:xsd="http://www.w3.org/2001/XMLSchema" xmlns:xs="http://www.w3.org/2001/XMLSchema" xmlns:p="http://schemas.microsoft.com/office/2006/metadata/properties" xmlns:ns2="70c72344-a901-41cd-a6da-bfcf15d570e1" xmlns:ns3="22093b91-50a3-4498-82d5-91368db29ba4" targetNamespace="http://schemas.microsoft.com/office/2006/metadata/properties" ma:root="true" ma:fieldsID="31e3050130c87086719ba5c54b2edc86" ns2:_="" ns3:_="">
-    <xsd:import namespace="70c72344-a901-41cd-a6da-bfcf15d570e1"/>
-    <xsd:import namespace="22093b91-50a3-4498-82d5-91368db29ba4"/>
+<ct:contentTypeSchema xmlns:ct="http://schemas.microsoft.com/office/2006/metadata/contentType" xmlns:ma="http://schemas.microsoft.com/office/2006/metadata/properties/metaAttributes" ct:_="" ma:_="" ma:contentTypeName="ドキュメント" ma:contentTypeID="0x010100AD26169CDAAF6B41B8B557D8EAD22A36" ma:contentTypeVersion="11" ma:contentTypeDescription="新しいドキュメントを作成します。" ma:contentTypeScope="" ma:versionID="a52047099d1dd8de6e74bf87a4a73917">
+  <xsd:schema xmlns:xsd="http://www.w3.org/2001/XMLSchema" xmlns:xs="http://www.w3.org/2001/XMLSchema" xmlns:p="http://schemas.microsoft.com/office/2006/metadata/properties" xmlns:ns2="e356ba7c-6f75-4160-892e-139003efe231" targetNamespace="http://schemas.microsoft.com/office/2006/metadata/properties" ma:root="true" ma:fieldsID="429bb204e7b0455599c34819c2da32be" ns2:_="">
+    <xsd:import namespace="e356ba7c-6f75-4160-892e-139003efe231"/>
     <xsd:element name="properties">
       <xsd:complexType>
         <xsd:sequence>
@@ -43928,13 +43927,12 @@
                 <xsd:element ref="ns2:MediaServiceMetadata" minOccurs="0"/>
                 <xsd:element ref="ns2:MediaServiceFastMetadata" minOccurs="0"/>
                 <xsd:element ref="ns2:MediaServiceSearchProperties" minOccurs="0"/>
-                <xsd:element ref="ns2:MediaServiceBillingMetadata" minOccurs="0"/>
+                <xsd:element ref="ns2:MediaServiceDateTaken" minOccurs="0"/>
                 <xsd:element ref="ns2:MediaServiceGenerationTime" minOccurs="0"/>
                 <xsd:element ref="ns2:MediaServiceEventHashCode" minOccurs="0"/>
                 <xsd:element ref="ns2:MediaLengthInSeconds" minOccurs="0"/>
-                <xsd:element ref="ns2:MediaServiceDateTaken" minOccurs="0"/>
+                <xsd:element ref="ns2:MediaServiceBillingMetadata" minOccurs="0"/>
                 <xsd:element ref="ns2:lcf76f155ced4ddcb4097134ff3c332f" minOccurs="0"/>
-                <xsd:element ref="ns3:TaxCatchAll" minOccurs="0"/>
                 <xsd:element ref="ns2:MediaServiceOCR" minOccurs="0"/>
               </xsd:all>
             </xsd:complexType>
@@ -43943,7 +43941,7 @@
       </xsd:complexType>
     </xsd:element>
   </xsd:schema>
-  <xsd:schema xmlns:xsd="http://www.w3.org/2001/XMLSchema" xmlns:xs="http://www.w3.org/2001/XMLSchema" xmlns:dms="http://schemas.microsoft.com/office/2006/documentManagement/types" xmlns:pc="http://schemas.microsoft.com/office/infopath/2007/PartnerControls" targetNamespace="70c72344-a901-41cd-a6da-bfcf15d570e1" elementFormDefault="qualified">
+  <xsd:schema xmlns:xsd="http://www.w3.org/2001/XMLSchema" xmlns:xs="http://www.w3.org/2001/XMLSchema" xmlns:dms="http://schemas.microsoft.com/office/2006/documentManagement/types" xmlns:pc="http://schemas.microsoft.com/office/infopath/2007/PartnerControls" targetNamespace="e356ba7c-6f75-4160-892e-139003efe231" elementFormDefault="qualified">
     <xsd:import namespace="http://schemas.microsoft.com/office/2006/documentManagement/types"/>
     <xsd:import namespace="http://schemas.microsoft.com/office/infopath/2007/PartnerControls"/>
     <xsd:element name="MediaServiceMetadata" ma:index="8" nillable="true" ma:displayName="MediaServiceMetadata" ma:hidden="true" ma:internalName="MediaServiceMetadata" ma:readOnly="true">
@@ -43961,9 +43959,9 @@
         <xsd:restriction base="dms:Note"/>
       </xsd:simpleType>
     </xsd:element>
-    <xsd:element name="MediaServiceBillingMetadata" ma:index="11" nillable="true" ma:displayName="MediaServiceBillingMetadata" ma:hidden="true" ma:internalName="MediaServiceBillingMetadata" ma:readOnly="true">
+    <xsd:element name="MediaServiceDateTaken" ma:index="11" nillable="true" ma:displayName="MediaServiceDateTaken" ma:hidden="true" ma:indexed="true" ma:internalName="MediaServiceDateTaken" ma:readOnly="true">
       <xsd:simpleType>
-        <xsd:restriction base="dms:Note"/>
+        <xsd:restriction base="dms:Text"/>
       </xsd:simpleType>
     </xsd:element>
     <xsd:element name="MediaServiceGenerationTime" ma:index="12" nillable="true" ma:displayName="MediaServiceGenerationTime" ma:hidden="true" ma:internalName="MediaServiceGenerationTime" ma:readOnly="true">
@@ -43981,39 +43979,24 @@
         <xsd:restriction base="dms:Unknown"/>
       </xsd:simpleType>
     </xsd:element>
-    <xsd:element name="MediaServiceDateTaken" ma:index="15" nillable="true" ma:displayName="MediaServiceDateTaken" ma:hidden="true" ma:indexed="true" ma:internalName="MediaServiceDateTaken" ma:readOnly="true">
+    <xsd:element name="MediaServiceBillingMetadata" ma:index="15" nillable="true" ma:displayName="MediaServiceBillingMetadata" ma:hidden="true" ma:internalName="MediaServiceBillingMetadata" ma:readOnly="true">
       <xsd:simpleType>
-        <xsd:restriction base="dms:Text"/>
+        <xsd:restriction base="dms:Note"/>
       </xsd:simpleType>
     </xsd:element>
-    <xsd:element name="lcf76f155ced4ddcb4097134ff3c332f" ma:index="17" nillable="true" ma:taxonomy="true" ma:internalName="lcf76f155ced4ddcb4097134ff3c332f" ma:taxonomyFieldName="MediaServiceImageTags" ma:displayName="Image Tags" ma:readOnly="false" ma:fieldId="{5cf76f15-5ced-4ddc-b409-7134ff3c332f}" ma:taxonomyMulti="true" ma:sspId="6d165d17-9b79-46c3-82b9-c927e733c429" ma:termSetId="09814cd3-568e-fe90-9814-8d621ff8fb84" ma:anchorId="fba54fb3-c3e1-fe81-a776-ca4b69148c4d" ma:open="true" ma:isKeyword="false">
+    <xsd:element name="lcf76f155ced4ddcb4097134ff3c332f" ma:index="17" nillable="true" ma:taxonomy="true" ma:internalName="lcf76f155ced4ddcb4097134ff3c332f" ma:taxonomyFieldName="MediaServiceImageTags" ma:displayName="画像タグ" ma:readOnly="false" ma:fieldId="{5cf76f15-5ced-4ddc-b409-7134ff3c332f}" ma:taxonomyMulti="true" ma:sspId="0347f584-7be2-4218-8e94-402d99aedf0b" ma:termSetId="09814cd3-568e-fe90-9814-8d621ff8fb84" ma:anchorId="fba54fb3-c3e1-fe81-a776-ca4b69148c4d" ma:open="true" ma:isKeyword="false">
       <xsd:complexType>
         <xsd:sequence>
           <xsd:element ref="pc:Terms" minOccurs="0" maxOccurs="1"/>
         </xsd:sequence>
       </xsd:complexType>
     </xsd:element>
-    <xsd:element name="MediaServiceOCR" ma:index="19" nillable="true" ma:displayName="Extracted Text" ma:internalName="MediaServiceOCR" ma:readOnly="true">
+    <xsd:element name="MediaServiceOCR" ma:index="18" nillable="true" ma:displayName="Extracted Text" ma:internalName="MediaServiceOCR" ma:readOnly="true">
       <xsd:simpleType>
         <xsd:restriction base="dms:Note">
           <xsd:maxLength value="255"/>
         </xsd:restriction>
       </xsd:simpleType>
-    </xsd:element>
-  </xsd:schema>
-  <xsd:schema xmlns:xsd="http://www.w3.org/2001/XMLSchema" xmlns:xs="http://www.w3.org/2001/XMLSchema" xmlns:dms="http://schemas.microsoft.com/office/2006/documentManagement/types" xmlns:pc="http://schemas.microsoft.com/office/infopath/2007/PartnerControls" targetNamespace="22093b91-50a3-4498-82d5-91368db29ba4" elementFormDefault="qualified">
-    <xsd:import namespace="http://schemas.microsoft.com/office/2006/documentManagement/types"/>
-    <xsd:import namespace="http://schemas.microsoft.com/office/infopath/2007/PartnerControls"/>
-    <xsd:element name="TaxCatchAll" ma:index="18" nillable="true" ma:displayName="Taxonomy Catch All Column" ma:hidden="true" ma:list="{975ea22b-104f-4a38-8a21-90e040114398}" ma:internalName="TaxCatchAll" ma:showField="CatchAllData" ma:web="22093b91-50a3-4498-82d5-91368db29ba4">
-      <xsd:complexType>
-        <xsd:complexContent>
-          <xsd:extension base="dms:MultiChoiceLookup">
-            <xsd:sequence>
-              <xsd:element name="Value" type="dms:Lookup" maxOccurs="unbounded" minOccurs="0" nillable="true"/>
-            </xsd:sequence>
-          </xsd:extension>
-        </xsd:complexContent>
-      </xsd:complexType>
     </xsd:element>
   </xsd:schema>
   <xsd:schema xmlns="http://schemas.openxmlformats.org/package/2006/metadata/core-properties" xmlns:xsd="http://www.w3.org/2001/XMLSchema" xmlns:xsi="http://www.w3.org/2001/XMLSchema-instance" xmlns:dc="http://purl.org/dc/elements/1.1/" xmlns:dcterms="http://purl.org/dc/terms/" xmlns:odoc="http://schemas.microsoft.com/internal/obd" targetNamespace="http://schemas.openxmlformats.org/package/2006/metadata/core-properties" elementFormDefault="qualified" attributeFormDefault="unqualified" blockDefault="#all">
@@ -44025,8 +44008,8 @@
         <xsd:element ref="dc:creator" minOccurs="0" maxOccurs="1"/>
         <xsd:element ref="dcterms:created" minOccurs="0" maxOccurs="1"/>
         <xsd:element ref="dc:identifier" minOccurs="0" maxOccurs="1"/>
-        <xsd:element name="contentType" minOccurs="0" maxOccurs="1" type="xsd:string" ma:index="0" ma:displayName="Content Type"/>
-        <xsd:element ref="dc:title" minOccurs="0" maxOccurs="1" ma:index="4" ma:displayName="Title"/>
+        <xsd:element name="contentType" minOccurs="0" maxOccurs="1" type="xsd:string" ma:index="0" ma:displayName="コンテンツ タイプ"/>
+        <xsd:element ref="dc:title" minOccurs="0" maxOccurs="1" ma:index="4" ma:displayName="タイトル"/>
         <xsd:element ref="dc:subject" minOccurs="0" maxOccurs="1"/>
         <xsd:element ref="dc:description" minOccurs="0" maxOccurs="1"/>
         <xsd:element name="keywords" minOccurs="0" maxOccurs="1" type="xsd:string"/>
@@ -44118,10 +44101,9 @@
 <file path=customXml/item3.xml><?xml version="1.0" encoding="utf-8"?>
 <p:properties xmlns:p="http://schemas.microsoft.com/office/2006/metadata/properties" xmlns:xsi="http://www.w3.org/2001/XMLSchema-instance" xmlns:pc="http://schemas.microsoft.com/office/infopath/2007/PartnerControls">
   <documentManagement>
-    <lcf76f155ced4ddcb4097134ff3c332f xmlns="70c72344-a901-41cd-a6da-bfcf15d570e1">
+    <lcf76f155ced4ddcb4097134ff3c332f xmlns="e356ba7c-6f75-4160-892e-139003efe231">
       <Terms xmlns="http://schemas.microsoft.com/office/infopath/2007/PartnerControls"/>
     </lcf76f155ced4ddcb4097134ff3c332f>
-    <TaxCatchAll xmlns="22093b91-50a3-4498-82d5-91368db29ba4" xsi:nil="true"/>
   </documentManagement>
 </p:properties>
 </file>
@@ -44135,22 +44117,7 @@
 </file>
 
 <file path=customXml/itemProps2.xml><?xml version="1.0" encoding="utf-8"?>
-<ds:datastoreItem xmlns:ds="http://schemas.openxmlformats.org/officeDocument/2006/customXml" ds:itemID="{871BE6B2-6DBE-4CC9-B7DE-EF8F12017839}">
-  <ds:schemaRefs>
-    <ds:schemaRef ds:uri="22093b91-50a3-4498-82d5-91368db29ba4"/>
-    <ds:schemaRef ds:uri="70c72344-a901-41cd-a6da-bfcf15d570e1"/>
-    <ds:schemaRef ds:uri="http://purl.org/dc/elements/1.1/"/>
-    <ds:schemaRef ds:uri="http://purl.org/dc/terms/"/>
-    <ds:schemaRef ds:uri="http://schemas.microsoft.com/internal/obd"/>
-    <ds:schemaRef ds:uri="http://schemas.microsoft.com/office/2006/documentManagement/types"/>
-    <ds:schemaRef ds:uri="http://schemas.microsoft.com/office/2006/metadata/contentType"/>
-    <ds:schemaRef ds:uri="http://schemas.microsoft.com/office/2006/metadata/properties"/>
-    <ds:schemaRef ds:uri="http://schemas.microsoft.com/office/2006/metadata/properties/metaAttributes"/>
-    <ds:schemaRef ds:uri="http://schemas.microsoft.com/office/infopath/2007/PartnerControls"/>
-    <ds:schemaRef ds:uri="http://schemas.openxmlformats.org/package/2006/metadata/core-properties"/>
-    <ds:schemaRef ds:uri="http://www.w3.org/2001/XMLSchema"/>
-  </ds:schemaRefs>
-</ds:datastoreItem>
+<ds:datastoreItem xmlns:ds="http://schemas.openxmlformats.org/officeDocument/2006/customXml" ds:itemID="{45AA4B71-8032-41CE-BE07-8D57822F10FF}"/>
 </file>
 
 <file path=customXml/itemProps3.xml><?xml version="1.0" encoding="utf-8"?>
